--- a/ppt/Grade09/ICSE9_Pressure_PartA_1_Thrust_and_Liquid_Pressure.pptx
+++ b/ppt/Grade09/ICSE9_Pressure_PartA_1_Thrust_and_Liquid_Pressure.pptx
@@ -4662,7 +4662,7 @@
       </p:sp>
       <p:pic>
         <p:nvPicPr>
-          <p:cNvPr id="7" name="Picture 6" descr="pr_fig_4_2.png"/>
+          <p:cNvPr id="7" name="Picture 6" descr="hero1.png"/>
           <p:cNvPicPr>
             <a:picLocks noChangeAspect="1"/>
           </p:cNvPicPr>
@@ -5314,7 +5314,7 @@
       </p:sp>
       <p:pic>
         <p:nvPicPr>
-          <p:cNvPr id="6" name="Picture 5" descr="pr_fig_4_2.png"/>
+          <p:cNvPr id="6" name="Picture 5" descr="fig_4_2.png"/>
           <p:cNvPicPr>
             <a:picLocks noChangeAspect="1"/>
           </p:cNvPicPr>
@@ -32326,7 +32326,7 @@
       </p:sp>
       <p:pic>
         <p:nvPicPr>
-          <p:cNvPr id="6" name="Picture 5" descr="pr_fig_4_1.png"/>
+          <p:cNvPr id="6" name="Picture 5" descr="fig_4_1.png"/>
           <p:cNvPicPr>
             <a:picLocks noChangeAspect="1"/>
           </p:cNvPicPr>
